--- a/vystuplenie-itk/ТАИСЬЯ_презентация.pptx
+++ b/vystuplenie-itk/ТАИСЬЯ_презентация.pptx
@@ -4970,7 +4970,7 @@
                 </a:solidFill>
                 <a:latin typeface="Arial"/>
               </a:rPr>
-              <a:t>тема 18  ·  часы, не характер</a:t>
+              <a:t>часы, не характер</a:t>
             </a:r>
           </a:p>
         </p:txBody>
